--- a/08_Arrays/08_Arrays.pptx
+++ b/08_Arrays/08_Arrays.pptx
@@ -213,7 +213,7 @@
           <a:p>
             <a:fld id="{BF336932-01FD-45AF-B110-84880AA37D65}" type="datetimeFigureOut">
               <a:rPr lang="de-AT" smtClean="0"/>
-              <a:t>05.03.2021</a:t>
+              <a:t>25.02.2022</a:t>
             </a:fld>
             <a:endParaRPr lang="de-AT"/>
           </a:p>
@@ -7148,7 +7148,7 @@
         <p:spPr>
           <a:xfrm>
             <a:off x="540172" y="1489348"/>
-            <a:ext cx="7272808" cy="646331"/>
+            <a:ext cx="7272808" cy="923330"/>
           </a:xfrm>
           <a:prstGeom prst="rect">
             <a:avLst/>
@@ -7162,91 +7162,103 @@
           <a:lstStyle/>
           <a:p>
             <a:r>
-              <a:rPr lang="de-AT" dirty="0" err="1">
-                <a:latin typeface="Courier New" panose="02070309020205020404" pitchFamily="49" charset="0"/>
-                <a:cs typeface="Courier New" panose="02070309020205020404" pitchFamily="49" charset="0"/>
+              <a:rPr lang="en-US" sz="1800" dirty="0">
+                <a:solidFill>
+                  <a:srgbClr val="0000FF"/>
+                </a:solidFill>
+                <a:latin typeface="Cascadia Mono" panose="020B0609020000020004" pitchFamily="49" charset="0"/>
               </a:rPr>
               <a:t>int</a:t>
             </a:r>
             <a:r>
-              <a:rPr lang="de-AT" dirty="0">
-                <a:latin typeface="Courier New" panose="02070309020205020404" pitchFamily="49" charset="0"/>
-                <a:cs typeface="Courier New" panose="02070309020205020404" pitchFamily="49" charset="0"/>
-              </a:rPr>
-              <a:t>[] </a:t>
-            </a:r>
-            <a:r>
-              <a:rPr lang="de-AT" dirty="0" err="1">
-                <a:latin typeface="Courier New" panose="02070309020205020404" pitchFamily="49" charset="0"/>
-                <a:cs typeface="Courier New" panose="02070309020205020404" pitchFamily="49" charset="0"/>
-              </a:rPr>
-              <a:t>numbers</a:t>
-            </a:r>
-            <a:r>
-              <a:rPr lang="de-AT" dirty="0">
-                <a:latin typeface="Courier New" panose="02070309020205020404" pitchFamily="49" charset="0"/>
-                <a:cs typeface="Courier New" panose="02070309020205020404" pitchFamily="49" charset="0"/>
-              </a:rPr>
-              <a:t> = </a:t>
-            </a:r>
-            <a:r>
-              <a:rPr lang="de-AT" dirty="0" err="1">
-                <a:latin typeface="Courier New" panose="02070309020205020404" pitchFamily="49" charset="0"/>
-                <a:cs typeface="Courier New" panose="02070309020205020404" pitchFamily="49" charset="0"/>
+              <a:rPr lang="en-US" sz="1800" dirty="0">
+                <a:solidFill>
+                  <a:srgbClr val="000000"/>
+                </a:solidFill>
+                <a:latin typeface="Cascadia Mono" panose="020B0609020000020004" pitchFamily="49" charset="0"/>
+              </a:rPr>
+              <a:t>[] numbers = </a:t>
+            </a:r>
+            <a:r>
+              <a:rPr lang="en-US" sz="1800" dirty="0">
+                <a:solidFill>
+                  <a:srgbClr val="0000FF"/>
+                </a:solidFill>
+                <a:latin typeface="Cascadia Mono" panose="020B0609020000020004" pitchFamily="49" charset="0"/>
               </a:rPr>
               <a:t>new</a:t>
             </a:r>
             <a:r>
-              <a:rPr lang="de-AT" dirty="0">
-                <a:latin typeface="Courier New" panose="02070309020205020404" pitchFamily="49" charset="0"/>
-                <a:cs typeface="Courier New" panose="02070309020205020404" pitchFamily="49" charset="0"/>
+              <a:rPr lang="en-US" sz="1800" dirty="0">
+                <a:solidFill>
+                  <a:srgbClr val="000000"/>
+                </a:solidFill>
+                <a:latin typeface="Cascadia Mono" panose="020B0609020000020004" pitchFamily="49" charset="0"/>
               </a:rPr>
               <a:t> </a:t>
             </a:r>
             <a:r>
-              <a:rPr lang="de-AT" dirty="0" err="1">
-                <a:latin typeface="Courier New" panose="02070309020205020404" pitchFamily="49" charset="0"/>
-                <a:cs typeface="Courier New" panose="02070309020205020404" pitchFamily="49" charset="0"/>
+              <a:rPr lang="en-US" sz="1800" dirty="0">
+                <a:solidFill>
+                  <a:srgbClr val="0000FF"/>
+                </a:solidFill>
+                <a:latin typeface="Cascadia Mono" panose="020B0609020000020004" pitchFamily="49" charset="0"/>
               </a:rPr>
               <a:t>int</a:t>
             </a:r>
             <a:r>
-              <a:rPr lang="de-AT" dirty="0">
-                <a:latin typeface="Courier New" panose="02070309020205020404" pitchFamily="49" charset="0"/>
-                <a:cs typeface="Courier New" panose="02070309020205020404" pitchFamily="49" charset="0"/>
+              <a:rPr lang="en-US" sz="1800" dirty="0">
+                <a:solidFill>
+                  <a:srgbClr val="000000"/>
+                </a:solidFill>
+                <a:latin typeface="Cascadia Mono" panose="020B0609020000020004" pitchFamily="49" charset="0"/>
               </a:rPr>
               <a:t>[] { 2, 4, 3, 5, 5, 6, 4 };</a:t>
             </a:r>
           </a:p>
           <a:p>
             <a:r>
-              <a:rPr lang="de-AT" dirty="0" err="1">
-                <a:latin typeface="Courier New" panose="02070309020205020404" pitchFamily="49" charset="0"/>
-                <a:cs typeface="Courier New" panose="02070309020205020404" pitchFamily="49" charset="0"/>
+              <a:rPr lang="en-US" sz="1800" dirty="0">
+                <a:solidFill>
+                  <a:srgbClr val="0000FF"/>
+                </a:solidFill>
+                <a:latin typeface="Cascadia Mono" panose="020B0609020000020004" pitchFamily="49" charset="0"/>
               </a:rPr>
               <a:t>int</a:t>
             </a:r>
             <a:r>
-              <a:rPr lang="de-AT" dirty="0">
-                <a:latin typeface="Courier New" panose="02070309020205020404" pitchFamily="49" charset="0"/>
-                <a:cs typeface="Courier New" panose="02070309020205020404" pitchFamily="49" charset="0"/>
-              </a:rPr>
-              <a:t>[] </a:t>
-            </a:r>
-            <a:r>
-              <a:rPr lang="de-AT" dirty="0" err="1">
-                <a:latin typeface="Courier New" panose="02070309020205020404" pitchFamily="49" charset="0"/>
-                <a:cs typeface="Courier New" panose="02070309020205020404" pitchFamily="49" charset="0"/>
-              </a:rPr>
-              <a:t>numbers</a:t>
-            </a:r>
-            <a:r>
-              <a:rPr lang="de-AT" dirty="0">
-                <a:latin typeface="Courier New" panose="02070309020205020404" pitchFamily="49" charset="0"/>
-                <a:cs typeface="Courier New" panose="02070309020205020404" pitchFamily="49" charset="0"/>
-              </a:rPr>
-              <a:t> = { 2, 4, 3, 5, 5, 6, 4 };</a:t>
-            </a:r>
+              <a:rPr lang="en-US" sz="1800" dirty="0">
+                <a:solidFill>
+                  <a:srgbClr val="000000"/>
+                </a:solidFill>
+                <a:latin typeface="Cascadia Mono" panose="020B0609020000020004" pitchFamily="49" charset="0"/>
+              </a:rPr>
+              <a:t>[] numbers = { 2, 4, 3, 5, 5, 6, 4 };</a:t>
+            </a:r>
+          </a:p>
+          <a:p>
+            <a:r>
+              <a:rPr lang="en-US" sz="1800" dirty="0">
+                <a:solidFill>
+                  <a:srgbClr val="0000FF"/>
+                </a:solidFill>
+                <a:latin typeface="Cascadia Mono" panose="020B0609020000020004" pitchFamily="49" charset="0"/>
+              </a:rPr>
+              <a:t>var</a:t>
+            </a:r>
+            <a:r>
+              <a:rPr lang="en-US" sz="1800" dirty="0">
+                <a:solidFill>
+                  <a:srgbClr val="000000"/>
+                </a:solidFill>
+                <a:latin typeface="Cascadia Mono" panose="020B0609020000020004" pitchFamily="49" charset="0"/>
+              </a:rPr>
+              <a:t> numbers   = { 2, 4, 3, 5, 5, 6, 4 };</a:t>
+            </a:r>
+            <a:endParaRPr lang="de-AT" dirty="0">
+              <a:latin typeface="Courier New" panose="02070309020205020404" pitchFamily="49" charset="0"/>
+              <a:cs typeface="Courier New" panose="02070309020205020404" pitchFamily="49" charset="0"/>
+            </a:endParaRPr>
           </a:p>
         </p:txBody>
       </p:sp>
@@ -7341,30 +7353,273 @@
           </a:p>
         </p:txBody>
       </p:sp>
-      <p:pic>
-        <p:nvPicPr>
-          <p:cNvPr id="2" name="Grafik 1"/>
-          <p:cNvPicPr>
-            <a:picLocks noChangeAspect="1"/>
-          </p:cNvPicPr>
-          <p:nvPr/>
-        </p:nvPicPr>
-        <p:blipFill>
-          <a:blip r:embed="rId2"/>
-          <a:stretch>
-            <a:fillRect/>
-          </a:stretch>
-        </p:blipFill>
-        <p:spPr>
-          <a:xfrm>
-            <a:off x="642517" y="4241004"/>
-            <a:ext cx="6133635" cy="1780284"/>
-          </a:xfrm>
-          <a:prstGeom prst="rect">
-            <a:avLst/>
-          </a:prstGeom>
-        </p:spPr>
-      </p:pic>
+      <p:sp>
+        <p:nvSpPr>
+          <p:cNvPr id="23" name="Textfeld 22">
+            <a:extLst>
+              <a:ext uri="{FF2B5EF4-FFF2-40B4-BE49-F238E27FC236}">
+                <a16:creationId xmlns:a16="http://schemas.microsoft.com/office/drawing/2014/main" id="{A8D5CFAB-275E-48CE-A3AD-BD2A9A06C828}"/>
+              </a:ext>
+            </a:extLst>
+          </p:cNvPr>
+          <p:cNvSpPr txBox="1"/>
+          <p:nvPr/>
+        </p:nvSpPr>
+        <p:spPr>
+          <a:xfrm>
+            <a:off x="695792" y="4149080"/>
+            <a:ext cx="7558884" cy="1754326"/>
+          </a:xfrm>
+          <a:prstGeom prst="rect">
+            <a:avLst/>
+          </a:prstGeom>
+          <a:noFill/>
+        </p:spPr>
+        <p:txBody>
+          <a:bodyPr wrap="square">
+            <a:spAutoFit/>
+          </a:bodyPr>
+          <a:lstStyle/>
+          <a:p>
+            <a:r>
+              <a:rPr lang="de-AT" sz="1800" dirty="0" err="1">
+                <a:solidFill>
+                  <a:srgbClr val="0000FF"/>
+                </a:solidFill>
+                <a:latin typeface="Cascadia Mono" panose="020B0609020000020004" pitchFamily="49" charset="0"/>
+              </a:rPr>
+              <a:t>int</a:t>
+            </a:r>
+            <a:r>
+              <a:rPr lang="de-AT" sz="1800" dirty="0">
+                <a:solidFill>
+                  <a:srgbClr val="000000"/>
+                </a:solidFill>
+                <a:latin typeface="Cascadia Mono" panose="020B0609020000020004" pitchFamily="49" charset="0"/>
+              </a:rPr>
+              <a:t> </a:t>
+            </a:r>
+            <a:r>
+              <a:rPr lang="de-AT" sz="1800" dirty="0" err="1">
+                <a:solidFill>
+                  <a:srgbClr val="000000"/>
+                </a:solidFill>
+                <a:latin typeface="Cascadia Mono" panose="020B0609020000020004" pitchFamily="49" charset="0"/>
+              </a:rPr>
+              <a:t>sum</a:t>
+            </a:r>
+            <a:r>
+              <a:rPr lang="de-AT" sz="1800" dirty="0">
+                <a:solidFill>
+                  <a:srgbClr val="000000"/>
+                </a:solidFill>
+                <a:latin typeface="Cascadia Mono" panose="020B0609020000020004" pitchFamily="49" charset="0"/>
+              </a:rPr>
+              <a:t> = 0;</a:t>
+            </a:r>
+          </a:p>
+          <a:p>
+            <a:r>
+              <a:rPr lang="de-AT" sz="1800" dirty="0" err="1">
+                <a:solidFill>
+                  <a:srgbClr val="0000FF"/>
+                </a:solidFill>
+                <a:latin typeface="Cascadia Mono" panose="020B0609020000020004" pitchFamily="49" charset="0"/>
+              </a:rPr>
+              <a:t>for</a:t>
+            </a:r>
+            <a:r>
+              <a:rPr lang="de-AT" sz="1800" dirty="0">
+                <a:solidFill>
+                  <a:srgbClr val="000000"/>
+                </a:solidFill>
+                <a:latin typeface="Cascadia Mono" panose="020B0609020000020004" pitchFamily="49" charset="0"/>
+              </a:rPr>
+              <a:t>(</a:t>
+            </a:r>
+            <a:r>
+              <a:rPr lang="de-AT" sz="1800" dirty="0" err="1">
+                <a:solidFill>
+                  <a:srgbClr val="0000FF"/>
+                </a:solidFill>
+                <a:latin typeface="Cascadia Mono" panose="020B0609020000020004" pitchFamily="49" charset="0"/>
+              </a:rPr>
+              <a:t>int</a:t>
+            </a:r>
+            <a:r>
+              <a:rPr lang="de-AT" sz="1800" dirty="0">
+                <a:solidFill>
+                  <a:srgbClr val="000000"/>
+                </a:solidFill>
+                <a:latin typeface="Cascadia Mono" panose="020B0609020000020004" pitchFamily="49" charset="0"/>
+              </a:rPr>
+              <a:t> i =0;i&lt;</a:t>
+            </a:r>
+            <a:r>
+              <a:rPr lang="de-AT" sz="1800" dirty="0" err="1">
+                <a:solidFill>
+                  <a:srgbClr val="000000"/>
+                </a:solidFill>
+                <a:latin typeface="Cascadia Mono" panose="020B0609020000020004" pitchFamily="49" charset="0"/>
+              </a:rPr>
+              <a:t>numbers.Length;i</a:t>
+            </a:r>
+            <a:r>
+              <a:rPr lang="de-AT" sz="1800" dirty="0">
+                <a:solidFill>
+                  <a:srgbClr val="000000"/>
+                </a:solidFill>
+                <a:latin typeface="Cascadia Mono" panose="020B0609020000020004" pitchFamily="49" charset="0"/>
+              </a:rPr>
+              <a:t>++)</a:t>
+            </a:r>
+          </a:p>
+          <a:p>
+            <a:r>
+              <a:rPr lang="de-AT" sz="1800" dirty="0">
+                <a:solidFill>
+                  <a:srgbClr val="000000"/>
+                </a:solidFill>
+                <a:latin typeface="Cascadia Mono" panose="020B0609020000020004" pitchFamily="49" charset="0"/>
+              </a:rPr>
+              <a:t>{</a:t>
+            </a:r>
+          </a:p>
+          <a:p>
+            <a:r>
+              <a:rPr lang="de-AT" sz="1800" dirty="0">
+                <a:solidFill>
+                  <a:srgbClr val="000000"/>
+                </a:solidFill>
+                <a:latin typeface="Cascadia Mono" panose="020B0609020000020004" pitchFamily="49" charset="0"/>
+              </a:rPr>
+              <a:t>    </a:t>
+            </a:r>
+            <a:r>
+              <a:rPr lang="de-AT" sz="1800" dirty="0" err="1">
+                <a:solidFill>
+                  <a:srgbClr val="000000"/>
+                </a:solidFill>
+                <a:latin typeface="Cascadia Mono" panose="020B0609020000020004" pitchFamily="49" charset="0"/>
+              </a:rPr>
+              <a:t>sum</a:t>
+            </a:r>
+            <a:r>
+              <a:rPr lang="de-AT" sz="1800" dirty="0">
+                <a:solidFill>
+                  <a:srgbClr val="000000"/>
+                </a:solidFill>
+                <a:latin typeface="Cascadia Mono" panose="020B0609020000020004" pitchFamily="49" charset="0"/>
+              </a:rPr>
+              <a:t> += </a:t>
+            </a:r>
+            <a:r>
+              <a:rPr lang="de-AT" sz="1800" dirty="0" err="1">
+                <a:solidFill>
+                  <a:srgbClr val="000000"/>
+                </a:solidFill>
+                <a:latin typeface="Cascadia Mono" panose="020B0609020000020004" pitchFamily="49" charset="0"/>
+              </a:rPr>
+              <a:t>numbers</a:t>
+            </a:r>
+            <a:r>
+              <a:rPr lang="de-AT" sz="1800" dirty="0">
+                <a:solidFill>
+                  <a:srgbClr val="000000"/>
+                </a:solidFill>
+                <a:latin typeface="Cascadia Mono" panose="020B0609020000020004" pitchFamily="49" charset="0"/>
+              </a:rPr>
+              <a:t>[i];</a:t>
+            </a:r>
+          </a:p>
+          <a:p>
+            <a:r>
+              <a:rPr lang="de-AT" sz="1800" dirty="0">
+                <a:solidFill>
+                  <a:srgbClr val="000000"/>
+                </a:solidFill>
+                <a:latin typeface="Cascadia Mono" panose="020B0609020000020004" pitchFamily="49" charset="0"/>
+              </a:rPr>
+              <a:t>}</a:t>
+            </a:r>
+          </a:p>
+          <a:p>
+            <a:r>
+              <a:rPr lang="de-DE" sz="1800" dirty="0" err="1">
+                <a:solidFill>
+                  <a:srgbClr val="000000"/>
+                </a:solidFill>
+                <a:latin typeface="Cascadia Mono" panose="020B0609020000020004" pitchFamily="49" charset="0"/>
+              </a:rPr>
+              <a:t>Console.WriteLine</a:t>
+            </a:r>
+            <a:r>
+              <a:rPr lang="de-DE" sz="1800" dirty="0">
+                <a:solidFill>
+                  <a:srgbClr val="000000"/>
+                </a:solidFill>
+                <a:latin typeface="Cascadia Mono" panose="020B0609020000020004" pitchFamily="49" charset="0"/>
+              </a:rPr>
+              <a:t>(</a:t>
+            </a:r>
+            <a:r>
+              <a:rPr lang="de-DE" sz="1800" dirty="0">
+                <a:solidFill>
+                  <a:srgbClr val="A31515"/>
+                </a:solidFill>
+                <a:latin typeface="Cascadia Mono" panose="020B0609020000020004" pitchFamily="49" charset="0"/>
+              </a:rPr>
+              <a:t>$"Summe aller Zahlen </a:t>
+            </a:r>
+            <a:r>
+              <a:rPr lang="de-DE" sz="1800" dirty="0">
+                <a:solidFill>
+                  <a:srgbClr val="000000"/>
+                </a:solidFill>
+                <a:latin typeface="Cascadia Mono" panose="020B0609020000020004" pitchFamily="49" charset="0"/>
+              </a:rPr>
+              <a:t>{</a:t>
+            </a:r>
+            <a:r>
+              <a:rPr lang="de-DE" sz="1800" dirty="0" err="1">
+                <a:solidFill>
+                  <a:srgbClr val="000000"/>
+                </a:solidFill>
+                <a:latin typeface="Cascadia Mono" panose="020B0609020000020004" pitchFamily="49" charset="0"/>
+              </a:rPr>
+              <a:t>sum</a:t>
+            </a:r>
+            <a:r>
+              <a:rPr lang="de-DE" sz="1800" dirty="0">
+                <a:solidFill>
+                  <a:srgbClr val="000000"/>
+                </a:solidFill>
+                <a:latin typeface="Cascadia Mono" panose="020B0609020000020004" pitchFamily="49" charset="0"/>
+              </a:rPr>
+              <a:t>}</a:t>
+            </a:r>
+            <a:r>
+              <a:rPr lang="de-DE" sz="1800" dirty="0">
+                <a:solidFill>
+                  <a:srgbClr val="A31515"/>
+                </a:solidFill>
+                <a:latin typeface="Cascadia Mono" panose="020B0609020000020004" pitchFamily="49" charset="0"/>
+              </a:rPr>
+              <a:t>"</a:t>
+            </a:r>
+            <a:r>
+              <a:rPr lang="de-DE" sz="1800" dirty="0">
+                <a:solidFill>
+                  <a:srgbClr val="000000"/>
+                </a:solidFill>
+                <a:latin typeface="Cascadia Mono" panose="020B0609020000020004" pitchFamily="49" charset="0"/>
+              </a:rPr>
+              <a:t>);</a:t>
+            </a:r>
+            <a:endParaRPr lang="de-AT" dirty="0"/>
+          </a:p>
+        </p:txBody>
+      </p:sp>
     </p:spTree>
     <p:extLst>
       <p:ext uri="{BB962C8B-B14F-4D97-AF65-F5344CB8AC3E}">
@@ -7381,6 +7636,14 @@
 <file path=ppt/slides/slide6.xml><?xml version="1.0" encoding="utf-8"?>
 <p:sld xmlns:a="http://schemas.openxmlformats.org/drawingml/2006/main" xmlns:r="http://schemas.openxmlformats.org/officeDocument/2006/relationships" xmlns:p="http://schemas.openxmlformats.org/presentationml/2006/main">
   <p:cSld>
+    <p:bg>
+      <p:bgPr>
+        <a:solidFill>
+          <a:schemeClr val="bg1"/>
+        </a:solidFill>
+        <a:effectLst/>
+      </p:bgPr>
+    </p:bg>
     <p:spTree>
       <p:nvGrpSpPr>
         <p:cNvPr id="1" name=""/>
@@ -7397,7 +7660,7 @@
       </p:grpSpPr>
       <p:sp>
         <p:nvSpPr>
-          <p:cNvPr id="2" name="Titel 1"/>
+          <p:cNvPr id="7" name="Titel 6"/>
           <p:cNvSpPr>
             <a:spLocks noGrp="1"/>
           </p:cNvSpPr>
@@ -7411,200 +7674,423 @@
           <a:lstStyle/>
           <a:p>
             <a:r>
+              <a:rPr lang="de-AT" dirty="0"/>
+              <a:t>Eindimensionale Arrays - </a:t>
+            </a:r>
+            <a:r>
+              <a:rPr lang="de-AT" dirty="0" err="1"/>
+              <a:t>foreach</a:t>
+            </a:r>
+            <a:br>
+              <a:rPr lang="de-AT" dirty="0"/>
+            </a:br>
+            <a:endParaRPr lang="de-DE" dirty="0"/>
+          </a:p>
+        </p:txBody>
+      </p:sp>
+      <p:sp>
+        <p:nvSpPr>
+          <p:cNvPr id="19" name="Textfeld 18"/>
+          <p:cNvSpPr txBox="1"/>
+          <p:nvPr/>
+        </p:nvSpPr>
+        <p:spPr>
+          <a:xfrm>
+            <a:off x="413305" y="1052736"/>
+            <a:ext cx="7975120" cy="2031325"/>
+          </a:xfrm>
+          <a:prstGeom prst="rect">
+            <a:avLst/>
+          </a:prstGeom>
+          <a:noFill/>
+        </p:spPr>
+        <p:txBody>
+          <a:bodyPr wrap="square" rtlCol="0">
+            <a:spAutoFit/>
+          </a:bodyPr>
+          <a:lstStyle/>
+          <a:p>
+            <a:r>
               <a:rPr lang="de-DE" dirty="0"/>
-              <a:t>Mehrdimensionale Arrays</a:t>
-            </a:r>
-          </a:p>
-        </p:txBody>
-      </p:sp>
-      <p:sp>
-        <p:nvSpPr>
-          <p:cNvPr id="3" name="Textplatzhalter 2"/>
-          <p:cNvSpPr>
-            <a:spLocks noGrp="1"/>
-          </p:cNvSpPr>
-          <p:nvPr>
-            <p:ph type="body" sz="quarter" idx="10"/>
-          </p:nvPr>
-        </p:nvSpPr>
-        <p:spPr>
-          <a:xfrm>
-            <a:off x="468313" y="1052736"/>
-            <a:ext cx="8207375" cy="4608165"/>
-          </a:xfrm>
-        </p:spPr>
-        <p:txBody>
-          <a:bodyPr/>
-          <a:lstStyle/>
-          <a:p>
-            <a:r>
-              <a:rPr lang="de-DE" sz="2400" dirty="0"/>
-              <a:t>Deklaration</a:t>
-            </a:r>
-          </a:p>
-          <a:p>
-            <a:endParaRPr lang="de-DE" sz="2400" dirty="0"/>
-          </a:p>
-          <a:p>
-            <a:endParaRPr lang="de-DE" sz="2400" dirty="0"/>
-          </a:p>
-          <a:p>
-            <a:r>
-              <a:rPr lang="de-DE" sz="2400" dirty="0"/>
-              <a:t>Definition</a:t>
-            </a:r>
-          </a:p>
-          <a:p>
-            <a:endParaRPr lang="de-DE" sz="2400" dirty="0"/>
-          </a:p>
-          <a:p>
-            <a:endParaRPr lang="de-DE" sz="2400" dirty="0"/>
-          </a:p>
-          <a:p>
-            <a:r>
-              <a:rPr lang="de-DE" sz="2400" dirty="0"/>
-              <a:t>Zugriff über Index</a:t>
-            </a:r>
-          </a:p>
-          <a:p>
-            <a:endParaRPr lang="de-DE" sz="2400" dirty="0"/>
-          </a:p>
-          <a:p>
-            <a:endParaRPr lang="de-DE" sz="2400" dirty="0"/>
-          </a:p>
-          <a:p>
-            <a:r>
-              <a:rPr lang="de-DE" sz="2400" dirty="0"/>
-              <a:t>Anzahl der Elemente je Dimension</a:t>
-            </a:r>
-          </a:p>
-          <a:p>
-            <a:pPr lvl="1"/>
-            <a:r>
-              <a:rPr lang="de-DE" sz="2000" dirty="0" err="1"/>
-              <a:t>Length</a:t>
-            </a:r>
-            <a:r>
-              <a:rPr lang="de-DE" sz="2000" dirty="0"/>
-              <a:t> liefert die gesamte </a:t>
-            </a:r>
-            <a:r>
-              <a:rPr lang="de-DE" sz="2000" dirty="0" err="1"/>
-              <a:t>Anzah</a:t>
-            </a:r>
-            <a:r>
-              <a:rPr lang="de-DE" sz="2000" dirty="0"/>
-              <a:t> in der Matrix</a:t>
-            </a:r>
-          </a:p>
-          <a:p>
-            <a:endParaRPr lang="de-DE" sz="2400" dirty="0"/>
-          </a:p>
-          <a:p>
-            <a:endParaRPr lang="de-DE" sz="2400" dirty="0"/>
-          </a:p>
-        </p:txBody>
-      </p:sp>
-      <p:pic>
-        <p:nvPicPr>
-          <p:cNvPr id="5" name="Grafik 4"/>
-          <p:cNvPicPr>
-            <a:picLocks noChangeAspect="1"/>
-          </p:cNvPicPr>
-          <p:nvPr/>
-        </p:nvPicPr>
-        <p:blipFill>
-          <a:blip r:embed="rId2"/>
-          <a:stretch>
-            <a:fillRect/>
-          </a:stretch>
-        </p:blipFill>
-        <p:spPr>
-          <a:xfrm>
-            <a:off x="1043608" y="1563971"/>
-            <a:ext cx="3039658" cy="545156"/>
-          </a:xfrm>
-          <a:prstGeom prst="rect">
-            <a:avLst/>
-          </a:prstGeom>
-        </p:spPr>
-      </p:pic>
-      <p:pic>
-        <p:nvPicPr>
-          <p:cNvPr id="6" name="Grafik 5"/>
-          <p:cNvPicPr>
-            <a:picLocks noChangeAspect="1"/>
-          </p:cNvPicPr>
-          <p:nvPr/>
-        </p:nvPicPr>
-        <p:blipFill>
-          <a:blip r:embed="rId3"/>
-          <a:stretch>
-            <a:fillRect/>
-          </a:stretch>
-        </p:blipFill>
-        <p:spPr>
-          <a:xfrm>
-            <a:off x="1043608" y="2872834"/>
-            <a:ext cx="4486180" cy="661501"/>
-          </a:xfrm>
-          <a:prstGeom prst="rect">
-            <a:avLst/>
-          </a:prstGeom>
-        </p:spPr>
-      </p:pic>
-      <p:pic>
-        <p:nvPicPr>
-          <p:cNvPr id="7" name="Grafik 6"/>
-          <p:cNvPicPr>
-            <a:picLocks noChangeAspect="1"/>
-          </p:cNvPicPr>
-          <p:nvPr/>
-        </p:nvPicPr>
-        <p:blipFill>
-          <a:blip r:embed="rId4"/>
-          <a:stretch>
-            <a:fillRect/>
-          </a:stretch>
-        </p:blipFill>
-        <p:spPr>
-          <a:xfrm>
-            <a:off x="1043608" y="5888301"/>
-            <a:ext cx="5473247" cy="421019"/>
-          </a:xfrm>
-          <a:prstGeom prst="rect">
-            <a:avLst/>
-          </a:prstGeom>
-        </p:spPr>
-      </p:pic>
-      <p:pic>
-        <p:nvPicPr>
-          <p:cNvPr id="8" name="Grafik 7"/>
-          <p:cNvPicPr>
-            <a:picLocks noChangeAspect="1"/>
-          </p:cNvPicPr>
-          <p:nvPr/>
-        </p:nvPicPr>
-        <p:blipFill>
-          <a:blip r:embed="rId5"/>
-          <a:stretch>
-            <a:fillRect/>
-          </a:stretch>
-        </p:blipFill>
-        <p:spPr>
-          <a:xfrm>
-            <a:off x="1043608" y="4143323"/>
-            <a:ext cx="6774163" cy="517208"/>
-          </a:xfrm>
-          <a:prstGeom prst="rect">
-            <a:avLst/>
-          </a:prstGeom>
-        </p:spPr>
-      </p:pic>
+              <a:t>C# </a:t>
+            </a:r>
+            <a:r>
+              <a:rPr lang="de-DE" dirty="0" err="1"/>
+              <a:t>foreach</a:t>
+            </a:r>
+            <a:r>
+              <a:rPr lang="de-DE" dirty="0"/>
+              <a:t> </a:t>
+            </a:r>
+            <a:br>
+              <a:rPr lang="de-DE" dirty="0"/>
+            </a:br>
+            <a:endParaRPr lang="de-DE" dirty="0"/>
+          </a:p>
+          <a:p>
+            <a:r>
+              <a:rPr lang="de-DE" dirty="0"/>
+              <a:t>Diese Schleifen-Konstruktion </a:t>
+            </a:r>
+            <a:r>
+              <a:rPr lang="de-DE" u="sng" dirty="0"/>
+              <a:t>kann</a:t>
+            </a:r>
+            <a:r>
+              <a:rPr lang="de-DE" dirty="0"/>
+              <a:t> verwendet werden:</a:t>
+            </a:r>
+          </a:p>
+          <a:p>
+            <a:pPr marL="285750" indent="-285750">
+              <a:buFont typeface="Arial" panose="020B0604020202020204" pitchFamily="34" charset="0"/>
+              <a:buChar char="•"/>
+            </a:pPr>
+            <a:r>
+              <a:rPr lang="de-DE" dirty="0"/>
+              <a:t>Wenn der Index nicht benötigt wird.</a:t>
+            </a:r>
+          </a:p>
+          <a:p>
+            <a:pPr marL="285750" indent="-285750">
+              <a:buFont typeface="Arial" panose="020B0604020202020204" pitchFamily="34" charset="0"/>
+              <a:buChar char="•"/>
+            </a:pPr>
+            <a:r>
+              <a:rPr lang="de-DE" dirty="0"/>
+              <a:t>Wenn nur „lesend“ auf die Elemente des Arrays zugegriffen wird.</a:t>
+            </a:r>
+            <a:br>
+              <a:rPr lang="de-DE" dirty="0"/>
+            </a:br>
+            <a:r>
+              <a:rPr lang="de-DE" dirty="0"/>
+              <a:t>Ein Zuweisen der Array-Elemente ist nicht möglich.</a:t>
+            </a:r>
+            <a:br>
+              <a:rPr lang="de-DE" dirty="0"/>
+            </a:br>
+            <a:endParaRPr lang="de-DE" dirty="0"/>
+          </a:p>
+        </p:txBody>
+      </p:sp>
+      <p:sp>
+        <p:nvSpPr>
+          <p:cNvPr id="23" name="Textfeld 22">
+            <a:extLst>
+              <a:ext uri="{FF2B5EF4-FFF2-40B4-BE49-F238E27FC236}">
+                <a16:creationId xmlns:a16="http://schemas.microsoft.com/office/drawing/2014/main" id="{A8D5CFAB-275E-48CE-A3AD-BD2A9A06C828}"/>
+              </a:ext>
+            </a:extLst>
+          </p:cNvPr>
+          <p:cNvSpPr txBox="1"/>
+          <p:nvPr/>
+        </p:nvSpPr>
+        <p:spPr>
+          <a:xfrm>
+            <a:off x="422889" y="3240339"/>
+            <a:ext cx="7558884" cy="2585323"/>
+          </a:xfrm>
+          <a:prstGeom prst="rect">
+            <a:avLst/>
+          </a:prstGeom>
+          <a:noFill/>
+        </p:spPr>
+        <p:txBody>
+          <a:bodyPr wrap="square">
+            <a:spAutoFit/>
+          </a:bodyPr>
+          <a:lstStyle/>
+          <a:p>
+            <a:r>
+              <a:rPr lang="en-US" sz="1800" dirty="0">
+                <a:solidFill>
+                  <a:srgbClr val="0000FF"/>
+                </a:solidFill>
+                <a:latin typeface="Cascadia Mono" panose="020B0609020000020004" pitchFamily="49" charset="0"/>
+              </a:rPr>
+              <a:t>var</a:t>
+            </a:r>
+            <a:r>
+              <a:rPr lang="en-US" sz="1800" dirty="0">
+                <a:solidFill>
+                  <a:srgbClr val="000000"/>
+                </a:solidFill>
+                <a:latin typeface="Cascadia Mono" panose="020B0609020000020004" pitchFamily="49" charset="0"/>
+              </a:rPr>
+              <a:t> numbers   = { 2, 4, 3, 5, 5, 6, 4 };</a:t>
+            </a:r>
+            <a:endParaRPr lang="de-AT" dirty="0">
+              <a:latin typeface="Courier New" panose="02070309020205020404" pitchFamily="49" charset="0"/>
+              <a:cs typeface="Courier New" panose="02070309020205020404" pitchFamily="49" charset="0"/>
+            </a:endParaRPr>
+          </a:p>
+          <a:p>
+            <a:endParaRPr lang="de-AT" sz="1800" dirty="0">
+              <a:solidFill>
+                <a:srgbClr val="0000FF"/>
+              </a:solidFill>
+              <a:latin typeface="Cascadia Mono" panose="020B0609020000020004" pitchFamily="49" charset="0"/>
+            </a:endParaRPr>
+          </a:p>
+          <a:p>
+            <a:r>
+              <a:rPr lang="de-AT" sz="1800" dirty="0" err="1">
+                <a:solidFill>
+                  <a:srgbClr val="0000FF"/>
+                </a:solidFill>
+                <a:latin typeface="Cascadia Mono" panose="020B0609020000020004" pitchFamily="49" charset="0"/>
+              </a:rPr>
+              <a:t>int</a:t>
+            </a:r>
+            <a:r>
+              <a:rPr lang="de-AT" sz="1800" dirty="0">
+                <a:solidFill>
+                  <a:srgbClr val="000000"/>
+                </a:solidFill>
+                <a:latin typeface="Cascadia Mono" panose="020B0609020000020004" pitchFamily="49" charset="0"/>
+              </a:rPr>
+              <a:t> </a:t>
+            </a:r>
+            <a:r>
+              <a:rPr lang="de-AT" sz="1800" dirty="0" err="1">
+                <a:solidFill>
+                  <a:srgbClr val="000000"/>
+                </a:solidFill>
+                <a:latin typeface="Cascadia Mono" panose="020B0609020000020004" pitchFamily="49" charset="0"/>
+              </a:rPr>
+              <a:t>sum</a:t>
+            </a:r>
+            <a:r>
+              <a:rPr lang="de-AT" sz="1800" dirty="0">
+                <a:solidFill>
+                  <a:srgbClr val="000000"/>
+                </a:solidFill>
+                <a:latin typeface="Cascadia Mono" panose="020B0609020000020004" pitchFamily="49" charset="0"/>
+              </a:rPr>
+              <a:t> = 0;</a:t>
+            </a:r>
+            <a:br>
+              <a:rPr lang="de-AT" sz="1800" dirty="0">
+                <a:solidFill>
+                  <a:srgbClr val="000000"/>
+                </a:solidFill>
+                <a:latin typeface="Cascadia Mono" panose="020B0609020000020004" pitchFamily="49" charset="0"/>
+              </a:rPr>
+            </a:br>
+            <a:endParaRPr lang="de-AT" sz="1800" dirty="0">
+              <a:solidFill>
+                <a:srgbClr val="000000"/>
+              </a:solidFill>
+              <a:latin typeface="Cascadia Mono" panose="020B0609020000020004" pitchFamily="49" charset="0"/>
+            </a:endParaRPr>
+          </a:p>
+          <a:p>
+            <a:r>
+              <a:rPr lang="en-US" sz="1800" dirty="0">
+                <a:solidFill>
+                  <a:srgbClr val="0000FF"/>
+                </a:solidFill>
+                <a:latin typeface="Cascadia Mono" panose="020B0609020000020004" pitchFamily="49" charset="0"/>
+              </a:rPr>
+              <a:t>foreach</a:t>
+            </a:r>
+            <a:r>
+              <a:rPr lang="en-US" sz="1800" dirty="0">
+                <a:solidFill>
+                  <a:srgbClr val="000000"/>
+                </a:solidFill>
+                <a:latin typeface="Cascadia Mono" panose="020B0609020000020004" pitchFamily="49" charset="0"/>
+              </a:rPr>
+              <a:t> (</a:t>
+            </a:r>
+            <a:r>
+              <a:rPr lang="en-US" sz="1800" dirty="0">
+                <a:solidFill>
+                  <a:srgbClr val="0000FF"/>
+                </a:solidFill>
+                <a:latin typeface="Cascadia Mono" panose="020B0609020000020004" pitchFamily="49" charset="0"/>
+              </a:rPr>
+              <a:t>int</a:t>
+            </a:r>
+            <a:r>
+              <a:rPr lang="en-US" sz="1800" dirty="0">
+                <a:solidFill>
+                  <a:srgbClr val="000000"/>
+                </a:solidFill>
+                <a:latin typeface="Cascadia Mono" panose="020B0609020000020004" pitchFamily="49" charset="0"/>
+              </a:rPr>
+              <a:t> number </a:t>
+            </a:r>
+            <a:r>
+              <a:rPr lang="en-US" sz="1800" dirty="0">
+                <a:solidFill>
+                  <a:srgbClr val="0000FF"/>
+                </a:solidFill>
+                <a:latin typeface="Cascadia Mono" panose="020B0609020000020004" pitchFamily="49" charset="0"/>
+              </a:rPr>
+              <a:t>in</a:t>
+            </a:r>
+            <a:r>
+              <a:rPr lang="en-US" sz="1800" dirty="0">
+                <a:solidFill>
+                  <a:srgbClr val="000000"/>
+                </a:solidFill>
+                <a:latin typeface="Cascadia Mono" panose="020B0609020000020004" pitchFamily="49" charset="0"/>
+              </a:rPr>
+              <a:t> numbers)</a:t>
+            </a:r>
+          </a:p>
+          <a:p>
+            <a:r>
+              <a:rPr lang="de-AT" sz="1800" dirty="0">
+                <a:solidFill>
+                  <a:srgbClr val="000000"/>
+                </a:solidFill>
+                <a:latin typeface="Cascadia Mono" panose="020B0609020000020004" pitchFamily="49" charset="0"/>
+              </a:rPr>
+              <a:t>{</a:t>
+            </a:r>
+          </a:p>
+          <a:p>
+            <a:r>
+              <a:rPr lang="de-AT" sz="1800" dirty="0">
+                <a:solidFill>
+                  <a:srgbClr val="000000"/>
+                </a:solidFill>
+                <a:latin typeface="Cascadia Mono" panose="020B0609020000020004" pitchFamily="49" charset="0"/>
+              </a:rPr>
+              <a:t>    </a:t>
+            </a:r>
+            <a:r>
+              <a:rPr lang="de-AT" sz="1800" dirty="0" err="1">
+                <a:solidFill>
+                  <a:srgbClr val="000000"/>
+                </a:solidFill>
+                <a:latin typeface="Cascadia Mono" panose="020B0609020000020004" pitchFamily="49" charset="0"/>
+              </a:rPr>
+              <a:t>sum</a:t>
+            </a:r>
+            <a:r>
+              <a:rPr lang="de-AT" sz="1800" dirty="0">
+                <a:solidFill>
+                  <a:srgbClr val="000000"/>
+                </a:solidFill>
+                <a:latin typeface="Cascadia Mono" panose="020B0609020000020004" pitchFamily="49" charset="0"/>
+              </a:rPr>
+              <a:t> += </a:t>
+            </a:r>
+            <a:r>
+              <a:rPr lang="de-AT" sz="1800" dirty="0" err="1">
+                <a:solidFill>
+                  <a:srgbClr val="000000"/>
+                </a:solidFill>
+                <a:latin typeface="Cascadia Mono" panose="020B0609020000020004" pitchFamily="49" charset="0"/>
+              </a:rPr>
+              <a:t>number</a:t>
+            </a:r>
+            <a:r>
+              <a:rPr lang="de-AT" sz="1800" dirty="0">
+                <a:solidFill>
+                  <a:srgbClr val="000000"/>
+                </a:solidFill>
+                <a:latin typeface="Cascadia Mono" panose="020B0609020000020004" pitchFamily="49" charset="0"/>
+              </a:rPr>
+              <a:t>;</a:t>
+            </a:r>
+          </a:p>
+          <a:p>
+            <a:r>
+              <a:rPr lang="de-AT" sz="1800" dirty="0">
+                <a:solidFill>
+                  <a:srgbClr val="000000"/>
+                </a:solidFill>
+                <a:latin typeface="Cascadia Mono" panose="020B0609020000020004" pitchFamily="49" charset="0"/>
+              </a:rPr>
+              <a:t>}</a:t>
+            </a:r>
+          </a:p>
+          <a:p>
+            <a:r>
+              <a:rPr lang="de-DE" sz="1800" dirty="0" err="1">
+                <a:solidFill>
+                  <a:srgbClr val="000000"/>
+                </a:solidFill>
+                <a:latin typeface="Cascadia Mono" panose="020B0609020000020004" pitchFamily="49" charset="0"/>
+              </a:rPr>
+              <a:t>Console.WriteLine</a:t>
+            </a:r>
+            <a:r>
+              <a:rPr lang="de-DE" sz="1800" dirty="0">
+                <a:solidFill>
+                  <a:srgbClr val="000000"/>
+                </a:solidFill>
+                <a:latin typeface="Cascadia Mono" panose="020B0609020000020004" pitchFamily="49" charset="0"/>
+              </a:rPr>
+              <a:t>(</a:t>
+            </a:r>
+            <a:r>
+              <a:rPr lang="de-DE" sz="1800" dirty="0">
+                <a:solidFill>
+                  <a:srgbClr val="A31515"/>
+                </a:solidFill>
+                <a:latin typeface="Cascadia Mono" panose="020B0609020000020004" pitchFamily="49" charset="0"/>
+              </a:rPr>
+              <a:t>$"Summe aller Zahlen </a:t>
+            </a:r>
+            <a:r>
+              <a:rPr lang="de-DE" sz="1800" dirty="0">
+                <a:solidFill>
+                  <a:srgbClr val="000000"/>
+                </a:solidFill>
+                <a:latin typeface="Cascadia Mono" panose="020B0609020000020004" pitchFamily="49" charset="0"/>
+              </a:rPr>
+              <a:t>{</a:t>
+            </a:r>
+            <a:r>
+              <a:rPr lang="de-DE" sz="1800" dirty="0" err="1">
+                <a:solidFill>
+                  <a:srgbClr val="000000"/>
+                </a:solidFill>
+                <a:latin typeface="Cascadia Mono" panose="020B0609020000020004" pitchFamily="49" charset="0"/>
+              </a:rPr>
+              <a:t>sum</a:t>
+            </a:r>
+            <a:r>
+              <a:rPr lang="de-DE" sz="1800" dirty="0">
+                <a:solidFill>
+                  <a:srgbClr val="000000"/>
+                </a:solidFill>
+                <a:latin typeface="Cascadia Mono" panose="020B0609020000020004" pitchFamily="49" charset="0"/>
+              </a:rPr>
+              <a:t>}</a:t>
+            </a:r>
+            <a:r>
+              <a:rPr lang="de-DE" sz="1800" dirty="0">
+                <a:solidFill>
+                  <a:srgbClr val="A31515"/>
+                </a:solidFill>
+                <a:latin typeface="Cascadia Mono" panose="020B0609020000020004" pitchFamily="49" charset="0"/>
+              </a:rPr>
+              <a:t>"</a:t>
+            </a:r>
+            <a:r>
+              <a:rPr lang="de-DE" sz="1800" dirty="0">
+                <a:solidFill>
+                  <a:srgbClr val="000000"/>
+                </a:solidFill>
+                <a:latin typeface="Cascadia Mono" panose="020B0609020000020004" pitchFamily="49" charset="0"/>
+              </a:rPr>
+              <a:t>);</a:t>
+            </a:r>
+            <a:endParaRPr lang="de-AT" dirty="0"/>
+          </a:p>
+        </p:txBody>
+      </p:sp>
     </p:spTree>
     <p:extLst>
       <p:ext uri="{BB962C8B-B14F-4D97-AF65-F5344CB8AC3E}">
-        <p14:creationId xmlns:p14="http://schemas.microsoft.com/office/powerpoint/2010/main" val="1056521848"/>
+        <p14:creationId xmlns:p14="http://schemas.microsoft.com/office/powerpoint/2010/main" val="647700542"/>
       </p:ext>
     </p:extLst>
   </p:cSld>

--- a/08_Arrays/08_Arrays.pptx
+++ b/08_Arrays/08_Arrays.pptx
@@ -213,7 +213,7 @@
           <a:p>
             <a:fld id="{BF336932-01FD-45AF-B110-84880AA37D65}" type="datetimeFigureOut">
               <a:rPr lang="de-AT" smtClean="0"/>
-              <a:t>25.02.2022</a:t>
+              <a:t>27.02.2022</a:t>
             </a:fld>
             <a:endParaRPr lang="de-AT"/>
           </a:p>
@@ -3097,30 +3097,92 @@
           </a:p>
         </p:txBody>
       </p:sp>
-      <p:pic>
-        <p:nvPicPr>
-          <p:cNvPr id="2" name="Grafik 1"/>
-          <p:cNvPicPr>
-            <a:picLocks noChangeAspect="1"/>
-          </p:cNvPicPr>
-          <p:nvPr/>
-        </p:nvPicPr>
-        <p:blipFill>
-          <a:blip r:embed="rId2"/>
-          <a:stretch>
-            <a:fillRect/>
-          </a:stretch>
-        </p:blipFill>
-        <p:spPr>
-          <a:xfrm>
-            <a:off x="2273252" y="2900752"/>
-            <a:ext cx="4386980" cy="728273"/>
-          </a:xfrm>
-          <a:prstGeom prst="rect">
-            <a:avLst/>
-          </a:prstGeom>
-        </p:spPr>
-      </p:pic>
+      <p:sp>
+        <p:nvSpPr>
+          <p:cNvPr id="34" name="Textfeld 33">
+            <a:extLst>
+              <a:ext uri="{FF2B5EF4-FFF2-40B4-BE49-F238E27FC236}">
+                <a16:creationId xmlns:a16="http://schemas.microsoft.com/office/drawing/2014/main" id="{04651E13-288B-48B5-8D2A-6D63CEEA620D}"/>
+              </a:ext>
+            </a:extLst>
+          </p:cNvPr>
+          <p:cNvSpPr txBox="1"/>
+          <p:nvPr/>
+        </p:nvSpPr>
+        <p:spPr>
+          <a:xfrm>
+            <a:off x="1979712" y="3064764"/>
+            <a:ext cx="4627178" cy="369332"/>
+          </a:xfrm>
+          <a:prstGeom prst="rect">
+            <a:avLst/>
+          </a:prstGeom>
+          <a:noFill/>
+        </p:spPr>
+        <p:txBody>
+          <a:bodyPr wrap="square">
+            <a:spAutoFit/>
+          </a:bodyPr>
+          <a:lstStyle/>
+          <a:p>
+            <a:r>
+              <a:rPr lang="en-US" sz="1800" dirty="0">
+                <a:solidFill>
+                  <a:srgbClr val="0000FF"/>
+                </a:solidFill>
+                <a:latin typeface="Cascadia Mono" panose="020B0609020000020004" pitchFamily="49" charset="0"/>
+              </a:rPr>
+              <a:t>int</a:t>
+            </a:r>
+            <a:r>
+              <a:rPr lang="en-US" sz="1800" dirty="0">
+                <a:solidFill>
+                  <a:srgbClr val="000000"/>
+                </a:solidFill>
+                <a:latin typeface="Cascadia Mono" panose="020B0609020000020004" pitchFamily="49" charset="0"/>
+              </a:rPr>
+              <a:t>[] numbers = </a:t>
+            </a:r>
+            <a:r>
+              <a:rPr lang="en-US" sz="1800" dirty="0">
+                <a:solidFill>
+                  <a:srgbClr val="0000FF"/>
+                </a:solidFill>
+                <a:latin typeface="Cascadia Mono" panose="020B0609020000020004" pitchFamily="49" charset="0"/>
+              </a:rPr>
+              <a:t>new</a:t>
+            </a:r>
+            <a:r>
+              <a:rPr lang="en-US" sz="1800" dirty="0">
+                <a:solidFill>
+                  <a:srgbClr val="000000"/>
+                </a:solidFill>
+                <a:latin typeface="Cascadia Mono" panose="020B0609020000020004" pitchFamily="49" charset="0"/>
+              </a:rPr>
+              <a:t> </a:t>
+            </a:r>
+            <a:r>
+              <a:rPr lang="en-US" sz="1800" dirty="0">
+                <a:solidFill>
+                  <a:srgbClr val="0000FF"/>
+                </a:solidFill>
+                <a:latin typeface="Cascadia Mono" panose="020B0609020000020004" pitchFamily="49" charset="0"/>
+              </a:rPr>
+              <a:t>int</a:t>
+            </a:r>
+            <a:r>
+              <a:rPr lang="en-US" sz="1800" dirty="0">
+                <a:solidFill>
+                  <a:srgbClr val="000000"/>
+                </a:solidFill>
+                <a:latin typeface="Cascadia Mono" panose="020B0609020000020004" pitchFamily="49" charset="0"/>
+              </a:rPr>
+              <a:t>[10];</a:t>
+            </a:r>
+            <a:endParaRPr lang="de-AT" dirty="0"/>
+          </a:p>
+        </p:txBody>
+      </p:sp>
     </p:spTree>
     <p:extLst>
       <p:ext uri="{BB962C8B-B14F-4D97-AF65-F5344CB8AC3E}">
@@ -5956,30 +6018,207 @@
           </a:p>
         </p:txBody>
       </p:sp>
-      <p:pic>
-        <p:nvPicPr>
-          <p:cNvPr id="2" name="Grafik 1"/>
-          <p:cNvPicPr>
-            <a:picLocks noChangeAspect="1"/>
-          </p:cNvPicPr>
-          <p:nvPr/>
-        </p:nvPicPr>
-        <p:blipFill>
-          <a:blip r:embed="rId2"/>
-          <a:stretch>
-            <a:fillRect/>
-          </a:stretch>
-        </p:blipFill>
-        <p:spPr>
-          <a:xfrm>
-            <a:off x="899592" y="1219369"/>
-            <a:ext cx="5203535" cy="2034902"/>
-          </a:xfrm>
-          <a:prstGeom prst="rect">
-            <a:avLst/>
-          </a:prstGeom>
-        </p:spPr>
-      </p:pic>
+      <p:sp>
+        <p:nvSpPr>
+          <p:cNvPr id="35" name="Textfeld 34">
+            <a:extLst>
+              <a:ext uri="{FF2B5EF4-FFF2-40B4-BE49-F238E27FC236}">
+                <a16:creationId xmlns:a16="http://schemas.microsoft.com/office/drawing/2014/main" id="{F25088BD-0628-4542-BE34-DBE2B0A4110E}"/>
+              </a:ext>
+            </a:extLst>
+          </p:cNvPr>
+          <p:cNvSpPr txBox="1"/>
+          <p:nvPr/>
+        </p:nvSpPr>
+        <p:spPr>
+          <a:xfrm>
+            <a:off x="956732" y="1299244"/>
+            <a:ext cx="7200799" cy="1754326"/>
+          </a:xfrm>
+          <a:prstGeom prst="rect">
+            <a:avLst/>
+          </a:prstGeom>
+          <a:noFill/>
+        </p:spPr>
+        <p:txBody>
+          <a:bodyPr wrap="square">
+            <a:spAutoFit/>
+          </a:bodyPr>
+          <a:lstStyle/>
+          <a:p>
+            <a:r>
+              <a:rPr lang="en-US" sz="1800" dirty="0">
+                <a:solidFill>
+                  <a:srgbClr val="0000FF"/>
+                </a:solidFill>
+                <a:latin typeface="Cascadia Mono" panose="020B0609020000020004" pitchFamily="49" charset="0"/>
+              </a:rPr>
+              <a:t>int[]</a:t>
+            </a:r>
+            <a:r>
+              <a:rPr lang="en-US" sz="1800" dirty="0">
+                <a:solidFill>
+                  <a:srgbClr val="000000"/>
+                </a:solidFill>
+                <a:latin typeface="Cascadia Mono" panose="020B0609020000020004" pitchFamily="49" charset="0"/>
+              </a:rPr>
+              <a:t> numbers = </a:t>
+            </a:r>
+            <a:r>
+              <a:rPr lang="en-US" sz="1800" dirty="0">
+                <a:solidFill>
+                  <a:srgbClr val="0000FF"/>
+                </a:solidFill>
+                <a:latin typeface="Cascadia Mono" panose="020B0609020000020004" pitchFamily="49" charset="0"/>
+              </a:rPr>
+              <a:t>new</a:t>
+            </a:r>
+            <a:r>
+              <a:rPr lang="en-US" sz="1800" dirty="0">
+                <a:solidFill>
+                  <a:srgbClr val="000000"/>
+                </a:solidFill>
+                <a:latin typeface="Cascadia Mono" panose="020B0609020000020004" pitchFamily="49" charset="0"/>
+              </a:rPr>
+              <a:t> </a:t>
+            </a:r>
+            <a:r>
+              <a:rPr lang="en-US" sz="1800" dirty="0">
+                <a:solidFill>
+                  <a:srgbClr val="0000FF"/>
+                </a:solidFill>
+                <a:latin typeface="Cascadia Mono" panose="020B0609020000020004" pitchFamily="49" charset="0"/>
+              </a:rPr>
+              <a:t>int</a:t>
+            </a:r>
+            <a:r>
+              <a:rPr lang="en-US" sz="1800" dirty="0">
+                <a:solidFill>
+                  <a:srgbClr val="000000"/>
+                </a:solidFill>
+                <a:latin typeface="Cascadia Mono" panose="020B0609020000020004" pitchFamily="49" charset="0"/>
+              </a:rPr>
+              <a:t>[10];</a:t>
+            </a:r>
+          </a:p>
+          <a:p>
+            <a:endParaRPr lang="de-AT" sz="1800" dirty="0">
+              <a:solidFill>
+                <a:srgbClr val="000000"/>
+              </a:solidFill>
+              <a:latin typeface="Cascadia Mono" panose="020B0609020000020004" pitchFamily="49" charset="0"/>
+            </a:endParaRPr>
+          </a:p>
+          <a:p>
+            <a:r>
+              <a:rPr lang="de-AT" sz="1800" dirty="0" err="1">
+                <a:solidFill>
+                  <a:srgbClr val="0000FF"/>
+                </a:solidFill>
+                <a:latin typeface="Cascadia Mono" panose="020B0609020000020004" pitchFamily="49" charset="0"/>
+              </a:rPr>
+              <a:t>for</a:t>
+            </a:r>
+            <a:r>
+              <a:rPr lang="de-AT" sz="1800" dirty="0">
+                <a:solidFill>
+                  <a:srgbClr val="000000"/>
+                </a:solidFill>
+                <a:latin typeface="Cascadia Mono" panose="020B0609020000020004" pitchFamily="49" charset="0"/>
+              </a:rPr>
+              <a:t> (</a:t>
+            </a:r>
+            <a:r>
+              <a:rPr lang="de-AT" sz="1800" dirty="0" err="1">
+                <a:solidFill>
+                  <a:srgbClr val="0000FF"/>
+                </a:solidFill>
+                <a:latin typeface="Cascadia Mono" panose="020B0609020000020004" pitchFamily="49" charset="0"/>
+              </a:rPr>
+              <a:t>int</a:t>
+            </a:r>
+            <a:r>
+              <a:rPr lang="de-AT" sz="1800" dirty="0">
+                <a:solidFill>
+                  <a:srgbClr val="000000"/>
+                </a:solidFill>
+                <a:latin typeface="Cascadia Mono" panose="020B0609020000020004" pitchFamily="49" charset="0"/>
+              </a:rPr>
+              <a:t> i=0; i&lt;</a:t>
+            </a:r>
+            <a:r>
+              <a:rPr lang="de-AT" sz="1800" dirty="0" err="1">
+                <a:solidFill>
+                  <a:srgbClr val="000000"/>
+                </a:solidFill>
+                <a:latin typeface="Cascadia Mono" panose="020B0609020000020004" pitchFamily="49" charset="0"/>
+              </a:rPr>
+              <a:t>number.Length</a:t>
+            </a:r>
+            <a:r>
+              <a:rPr lang="de-AT" sz="1800" dirty="0">
+                <a:solidFill>
+                  <a:srgbClr val="000000"/>
+                </a:solidFill>
+                <a:latin typeface="Cascadia Mono" panose="020B0609020000020004" pitchFamily="49" charset="0"/>
+              </a:rPr>
+              <a:t>; i++)</a:t>
+            </a:r>
+          </a:p>
+          <a:p>
+            <a:r>
+              <a:rPr lang="de-AT" sz="1800" dirty="0">
+                <a:solidFill>
+                  <a:srgbClr val="000000"/>
+                </a:solidFill>
+                <a:latin typeface="Cascadia Mono" panose="020B0609020000020004" pitchFamily="49" charset="0"/>
+              </a:rPr>
+              <a:t>{</a:t>
+            </a:r>
+          </a:p>
+          <a:p>
+            <a:r>
+              <a:rPr lang="de-AT" sz="1800" dirty="0">
+                <a:solidFill>
+                  <a:srgbClr val="000000"/>
+                </a:solidFill>
+                <a:latin typeface="Cascadia Mono" panose="020B0609020000020004" pitchFamily="49" charset="0"/>
+              </a:rPr>
+              <a:t>   </a:t>
+            </a:r>
+            <a:r>
+              <a:rPr lang="de-AT" sz="1800" dirty="0" err="1">
+                <a:solidFill>
+                  <a:srgbClr val="000000"/>
+                </a:solidFill>
+                <a:latin typeface="Cascadia Mono" panose="020B0609020000020004" pitchFamily="49" charset="0"/>
+              </a:rPr>
+              <a:t>numbers</a:t>
+            </a:r>
+            <a:r>
+              <a:rPr lang="de-AT" sz="1800" dirty="0">
+                <a:solidFill>
+                  <a:srgbClr val="000000"/>
+                </a:solidFill>
+                <a:latin typeface="Cascadia Mono" panose="020B0609020000020004" pitchFamily="49" charset="0"/>
+              </a:rPr>
+              <a:t>[i] = 2 * (i + 1);</a:t>
+            </a:r>
+          </a:p>
+          <a:p>
+            <a:r>
+              <a:rPr lang="de-AT" sz="1800" dirty="0">
+                <a:solidFill>
+                  <a:srgbClr val="000000"/>
+                </a:solidFill>
+                <a:latin typeface="Cascadia Mono" panose="020B0609020000020004" pitchFamily="49" charset="0"/>
+              </a:rPr>
+              <a:t>}</a:t>
+            </a:r>
+            <a:endParaRPr lang="de-AT" dirty="0"/>
+          </a:p>
+        </p:txBody>
+      </p:sp>
     </p:spTree>
     <p:extLst>
       <p:ext uri="{BB962C8B-B14F-4D97-AF65-F5344CB8AC3E}">
@@ -6240,19 +6479,220 @@
             <a:endParaRPr lang="de-DE" dirty="0"/>
           </a:p>
           <a:p>
-            <a:endParaRPr lang="de-DE" dirty="0"/>
-          </a:p>
-          <a:p>
-            <a:endParaRPr lang="de-DE" dirty="0"/>
-          </a:p>
-          <a:p>
-            <a:endParaRPr lang="de-DE" dirty="0"/>
-          </a:p>
-          <a:p>
-            <a:endParaRPr lang="de-DE" dirty="0"/>
-          </a:p>
-          <a:p>
-            <a:endParaRPr lang="de-DE" dirty="0"/>
+            <a:r>
+              <a:rPr lang="en-US" sz="1800" dirty="0">
+                <a:solidFill>
+                  <a:srgbClr val="0000FF"/>
+                </a:solidFill>
+                <a:latin typeface="Cascadia Mono" panose="020B0609020000020004" pitchFamily="49" charset="0"/>
+              </a:rPr>
+              <a:t>int</a:t>
+            </a:r>
+            <a:r>
+              <a:rPr lang="en-US" sz="1800" dirty="0">
+                <a:solidFill>
+                  <a:srgbClr val="000000"/>
+                </a:solidFill>
+                <a:latin typeface="Cascadia Mono" panose="020B0609020000020004" pitchFamily="49" charset="0"/>
+              </a:rPr>
+              <a:t>[] numbers = </a:t>
+            </a:r>
+            <a:r>
+              <a:rPr lang="en-US" sz="1800" dirty="0">
+                <a:solidFill>
+                  <a:srgbClr val="0000FF"/>
+                </a:solidFill>
+                <a:latin typeface="Cascadia Mono" panose="020B0609020000020004" pitchFamily="49" charset="0"/>
+              </a:rPr>
+              <a:t>new</a:t>
+            </a:r>
+            <a:r>
+              <a:rPr lang="en-US" sz="1800" dirty="0">
+                <a:solidFill>
+                  <a:srgbClr val="000000"/>
+                </a:solidFill>
+                <a:latin typeface="Cascadia Mono" panose="020B0609020000020004" pitchFamily="49" charset="0"/>
+              </a:rPr>
+              <a:t> </a:t>
+            </a:r>
+            <a:r>
+              <a:rPr lang="en-US" sz="1800" dirty="0">
+                <a:solidFill>
+                  <a:srgbClr val="0000FF"/>
+                </a:solidFill>
+                <a:latin typeface="Cascadia Mono" panose="020B0609020000020004" pitchFamily="49" charset="0"/>
+              </a:rPr>
+              <a:t>int</a:t>
+            </a:r>
+            <a:r>
+              <a:rPr lang="en-US" sz="1800" dirty="0">
+                <a:solidFill>
+                  <a:srgbClr val="000000"/>
+                </a:solidFill>
+                <a:latin typeface="Cascadia Mono" panose="020B0609020000020004" pitchFamily="49" charset="0"/>
+              </a:rPr>
+              <a:t>[10];</a:t>
+            </a:r>
+          </a:p>
+          <a:p>
+            <a:endParaRPr lang="de-AT" sz="1800" dirty="0">
+              <a:solidFill>
+                <a:srgbClr val="000000"/>
+              </a:solidFill>
+              <a:latin typeface="Cascadia Mono" panose="020B0609020000020004" pitchFamily="49" charset="0"/>
+            </a:endParaRPr>
+          </a:p>
+          <a:p>
+            <a:r>
+              <a:rPr lang="de-AT" sz="1800" dirty="0" err="1">
+                <a:solidFill>
+                  <a:srgbClr val="0000FF"/>
+                </a:solidFill>
+                <a:latin typeface="Cascadia Mono" panose="020B0609020000020004" pitchFamily="49" charset="0"/>
+              </a:rPr>
+              <a:t>for</a:t>
+            </a:r>
+            <a:r>
+              <a:rPr lang="de-AT" sz="1800" dirty="0">
+                <a:solidFill>
+                  <a:srgbClr val="000000"/>
+                </a:solidFill>
+                <a:latin typeface="Cascadia Mono" panose="020B0609020000020004" pitchFamily="49" charset="0"/>
+              </a:rPr>
+              <a:t> (</a:t>
+            </a:r>
+            <a:r>
+              <a:rPr lang="de-AT" sz="1800" dirty="0" err="1">
+                <a:solidFill>
+                  <a:srgbClr val="0000FF"/>
+                </a:solidFill>
+                <a:latin typeface="Cascadia Mono" panose="020B0609020000020004" pitchFamily="49" charset="0"/>
+              </a:rPr>
+              <a:t>int</a:t>
+            </a:r>
+            <a:r>
+              <a:rPr lang="de-AT" sz="1800" dirty="0">
+                <a:solidFill>
+                  <a:srgbClr val="000000"/>
+                </a:solidFill>
+                <a:latin typeface="Cascadia Mono" panose="020B0609020000020004" pitchFamily="49" charset="0"/>
+              </a:rPr>
+              <a:t> i = 0; i &lt; </a:t>
+            </a:r>
+            <a:r>
+              <a:rPr lang="de-AT" sz="1800" dirty="0" err="1">
+                <a:solidFill>
+                  <a:srgbClr val="000000"/>
+                </a:solidFill>
+                <a:latin typeface="Cascadia Mono" panose="020B0609020000020004" pitchFamily="49" charset="0"/>
+              </a:rPr>
+              <a:t>number.Length</a:t>
+            </a:r>
+            <a:r>
+              <a:rPr lang="de-AT" sz="1800" dirty="0">
+                <a:solidFill>
+                  <a:srgbClr val="000000"/>
+                </a:solidFill>
+                <a:latin typeface="Cascadia Mono" panose="020B0609020000020004" pitchFamily="49" charset="0"/>
+              </a:rPr>
+              <a:t>; i++)</a:t>
+            </a:r>
+          </a:p>
+          <a:p>
+            <a:r>
+              <a:rPr lang="de-AT" sz="1800" dirty="0">
+                <a:solidFill>
+                  <a:srgbClr val="000000"/>
+                </a:solidFill>
+                <a:latin typeface="Cascadia Mono" panose="020B0609020000020004" pitchFamily="49" charset="0"/>
+              </a:rPr>
+              <a:t>{</a:t>
+            </a:r>
+          </a:p>
+          <a:p>
+            <a:r>
+              <a:rPr lang="de-AT" sz="1800" dirty="0">
+                <a:solidFill>
+                  <a:srgbClr val="000000"/>
+                </a:solidFill>
+                <a:latin typeface="Cascadia Mono" panose="020B0609020000020004" pitchFamily="49" charset="0"/>
+              </a:rPr>
+              <a:t>   </a:t>
+            </a:r>
+            <a:r>
+              <a:rPr lang="de-AT" sz="1800" dirty="0" err="1">
+                <a:solidFill>
+                  <a:srgbClr val="000000"/>
+                </a:solidFill>
+                <a:latin typeface="Cascadia Mono" panose="020B0609020000020004" pitchFamily="49" charset="0"/>
+              </a:rPr>
+              <a:t>numbers</a:t>
+            </a:r>
+            <a:r>
+              <a:rPr lang="de-AT" sz="1800" dirty="0">
+                <a:solidFill>
+                  <a:srgbClr val="000000"/>
+                </a:solidFill>
+                <a:latin typeface="Cascadia Mono" panose="020B0609020000020004" pitchFamily="49" charset="0"/>
+              </a:rPr>
+              <a:t>[i] = </a:t>
+            </a:r>
+            <a:r>
+              <a:rPr lang="de-AT" sz="1800" dirty="0" err="1">
+                <a:solidFill>
+                  <a:srgbClr val="0000FF"/>
+                </a:solidFill>
+                <a:latin typeface="Cascadia Mono" panose="020B0609020000020004" pitchFamily="49" charset="0"/>
+              </a:rPr>
+              <a:t>int</a:t>
+            </a:r>
+            <a:r>
+              <a:rPr lang="de-AT" sz="1800" dirty="0" err="1">
+                <a:solidFill>
+                  <a:srgbClr val="000000"/>
+                </a:solidFill>
+                <a:latin typeface="Cascadia Mono" panose="020B0609020000020004" pitchFamily="49" charset="0"/>
+              </a:rPr>
+              <a:t>.Parse</a:t>
+            </a:r>
+            <a:r>
+              <a:rPr lang="de-AT" sz="1800" dirty="0">
+                <a:solidFill>
+                  <a:srgbClr val="000000"/>
+                </a:solidFill>
+                <a:latin typeface="Cascadia Mono" panose="020B0609020000020004" pitchFamily="49" charset="0"/>
+              </a:rPr>
+              <a:t>(</a:t>
+            </a:r>
+            <a:r>
+              <a:rPr lang="de-AT" sz="1800" dirty="0" err="1">
+                <a:solidFill>
+                  <a:srgbClr val="000000"/>
+                </a:solidFill>
+                <a:latin typeface="Cascadia Mono" panose="020B0609020000020004" pitchFamily="49" charset="0"/>
+              </a:rPr>
+              <a:t>Console.ReadLine</a:t>
+            </a:r>
+            <a:r>
+              <a:rPr lang="de-AT" sz="1800" dirty="0">
+                <a:solidFill>
+                  <a:srgbClr val="000000"/>
+                </a:solidFill>
+                <a:latin typeface="Cascadia Mono" panose="020B0609020000020004" pitchFamily="49" charset="0"/>
+              </a:rPr>
+              <a:t>());</a:t>
+            </a:r>
+          </a:p>
+          <a:p>
+            <a:r>
+              <a:rPr lang="de-AT" sz="1800" dirty="0">
+                <a:solidFill>
+                  <a:srgbClr val="000000"/>
+                </a:solidFill>
+                <a:latin typeface="Cascadia Mono" panose="020B0609020000020004" pitchFamily="49" charset="0"/>
+              </a:rPr>
+              <a:t>}</a:t>
+            </a:r>
           </a:p>
           <a:p>
             <a:endParaRPr lang="de-DE" dirty="0"/>
@@ -6283,30 +6723,6 @@
           </a:p>
         </p:txBody>
       </p:sp>
-      <p:pic>
-        <p:nvPicPr>
-          <p:cNvPr id="2" name="Grafik 1"/>
-          <p:cNvPicPr>
-            <a:picLocks noChangeAspect="1"/>
-          </p:cNvPicPr>
-          <p:nvPr/>
-        </p:nvPicPr>
-        <p:blipFill>
-          <a:blip r:embed="rId2"/>
-          <a:stretch>
-            <a:fillRect/>
-          </a:stretch>
-        </p:blipFill>
-        <p:spPr>
-          <a:xfrm>
-            <a:off x="611560" y="2852936"/>
-            <a:ext cx="6572811" cy="1967657"/>
-          </a:xfrm>
-          <a:prstGeom prst="rect">
-            <a:avLst/>
-          </a:prstGeom>
-        </p:spPr>
-      </p:pic>
     </p:spTree>
     <p:extLst>
       <p:ext uri="{BB962C8B-B14F-4D97-AF65-F5344CB8AC3E}">

--- a/08_Arrays/08_Arrays.pptx
+++ b/08_Arrays/08_Arrays.pptx
@@ -213,7 +213,7 @@
           <a:p>
             <a:fld id="{BF336932-01FD-45AF-B110-84880AA37D65}" type="datetimeFigureOut">
               <a:rPr lang="de-AT" smtClean="0"/>
-              <a:t>27.02.2022</a:t>
+              <a:t>01.03.2022</a:t>
             </a:fld>
             <a:endParaRPr lang="de-AT"/>
           </a:p>
@@ -7669,7 +7669,25 @@
                 </a:solidFill>
                 <a:latin typeface="Cascadia Mono" panose="020B0609020000020004" pitchFamily="49" charset="0"/>
               </a:rPr>
-              <a:t> numbers   = { 2, 4, 3, 5, 5, 6, 4 };</a:t>
+              <a:t> numbers   = </a:t>
+            </a:r>
+            <a:r>
+              <a:rPr lang="en-US" sz="1800" dirty="0">
+                <a:solidFill>
+                  <a:srgbClr val="0000FF"/>
+                </a:solidFill>
+                <a:latin typeface="Cascadia Mono" panose="020B0609020000020004" pitchFamily="49" charset="0"/>
+              </a:rPr>
+              <a:t>new</a:t>
+            </a:r>
+            <a:r>
+              <a:rPr lang="en-US" sz="1800" dirty="0">
+                <a:solidFill>
+                  <a:srgbClr val="000000"/>
+                </a:solidFill>
+                <a:latin typeface="Cascadia Mono" panose="020B0609020000020004" pitchFamily="49" charset="0"/>
+              </a:rPr>
+              <a:t> [] { 2, 4, 3, 5, 5, 6, 4 };</a:t>
             </a:r>
             <a:endParaRPr lang="de-AT" dirty="0">
               <a:latin typeface="Courier New" panose="02070309020205020404" pitchFamily="49" charset="0"/>
